--- a/Session04Soldering/solderingInstructions.pptx
+++ b/Session04Soldering/solderingInstructions.pptx
@@ -17457,7 +17457,7 @@
           <a:p>
             <a:r>
               <a:rPr lang="en-US" dirty="0"/>
-              <a:t>Ventilator</a:t>
+              <a:t>Fume extractor</a:t>
             </a:r>
           </a:p>
           <a:p>
@@ -17993,7 +17993,7 @@
             </a:pPr>
             <a:r>
               <a:rPr lang="en-US" sz="2400" dirty="0"/>
-              <a:t>Use a properly sized point for the soldering job to be completed.</a:t>
+              <a:t>Use a properly sized tip for the soldering job.</a:t>
             </a:r>
           </a:p>
           <a:p>
@@ -18438,11 +18438,11 @@
             <a:pPr lvl="1"/>
             <a:r>
               <a:rPr lang="en-US" dirty="0" err="1"/>
-              <a:t>Pb</a:t>
+              <a:t>Tin, lead (Pb)</a:t>
             </a:r>
             <a:r>
               <a:rPr lang="en-US" dirty="0"/>
-              <a:t>, Tin</a:t>
+              <a:t/>
             </a:r>
           </a:p>
           <a:p>
@@ -18466,7 +18466,7 @@
           <a:p>
             <a:r>
               <a:rPr lang="en-US" dirty="0"/>
-              <a:t>2 types: leaded and Lead Free</a:t>
+              <a:t>2 types: leaded and lead-free</a:t>
             </a:r>
           </a:p>
           <a:p>
@@ -18595,11 +18595,11 @@
           <a:p>
             <a:r>
               <a:rPr lang="en-US" dirty="0" err="1"/>
-              <a:t>Pb</a:t>
+              <a:t>Tin, lead (Pb)</a:t>
             </a:r>
             <a:r>
               <a:rPr lang="en-US" dirty="0"/>
-              <a:t>, Tin</a:t>
+              <a:t/>
             </a:r>
           </a:p>
           <a:p>
@@ -18989,7 +18989,7 @@
               <a:rPr lang="en-US" sz="2400" dirty="0">
                 <a:cs typeface="Arial" charset="0"/>
               </a:rPr>
-              <a:t>Tip temperature 250°C to 280°C</a:t>
+              <a:t>Tip temperature 315°C to 370°C</a:t>
             </a:r>
           </a:p>
         </p:txBody>
